--- a/fpga/sw/export/docs/slides/02_Software_environment_and_tests.pptx
+++ b/fpga/sw/export/docs/slides/02_Software_environment_and_tests.pptx
@@ -8382,7 +8382,7 @@
                           </a:solidFill>
                           <a:latin typeface="Times New Roman"/>
                         </a:rPr>
-                        <a:t>these lessons (python-pptx generator)</a:t>
+                        <a:t>these lessons, PPTX and PDF</a:t>
                       </a:r>
                     </a:p>
                   </a:txBody>

--- a/fpga/sw/export/docs/slides/02_Software_environment_and_tests.pptx
+++ b/fpga/sw/export/docs/slides/02_Software_environment_and_tests.pptx
@@ -10154,7 +10154,7 @@
                 </a:solidFill>
                 <a:latin typeface="Consolas"/>
               </a:rPr>
-              <a:t>25319     0  1640  26959  694f build/edhoc_m3_...</a:t>
+              <a:t>25425     0  1640  27065  69b9 build/edhoc_m3_...</a:t>
             </a:r>
           </a:p>
           <a:p>
@@ -10393,7 +10393,7 @@
                           </a:solidFill>
                           <a:latin typeface="Times New Roman"/>
                         </a:rPr>
-                        <a:t>25,319</a:t>
+                        <a:t>25,425</a:t>
                       </a:r>
                     </a:p>
                   </a:txBody>
@@ -10437,7 +10437,7 @@
                           </a:solidFill>
                           <a:latin typeface="Times New Roman"/>
                         </a:rPr>
-                        <a:t>26,959</a:t>
+                        <a:t>27,065</a:t>
                       </a:r>
                     </a:p>
                   </a:txBody>
@@ -10481,7 +10481,7 @@
                           </a:solidFill>
                           <a:latin typeface="Times New Roman"/>
                         </a:rPr>
-                        <a:t>32,335</a:t>
+                        <a:t>32,441</a:t>
                       </a:r>
                     </a:p>
                   </a:txBody>
@@ -10503,7 +10503,7 @@
                           </a:solidFill>
                           <a:latin typeface="Times New Roman"/>
                         </a:rPr>
-                        <a:t>32 KiB (433 B left)</a:t>
+                        <a:t>32 KiB (327 B left)</a:t>
                       </a:r>
                     </a:p>
                   </a:txBody>
@@ -10549,7 +10549,7 @@
                           </a:solidFill>
                           <a:latin typeface="Times New Roman"/>
                         </a:rPr>
-                        <a:t>46,187</a:t>
+                        <a:t>46,359</a:t>
                       </a:r>
                     </a:p>
                   </a:txBody>
@@ -10593,7 +10593,7 @@
                           </a:solidFill>
                           <a:latin typeface="Times New Roman"/>
                         </a:rPr>
-                        <a:t>47,939</a:t>
+                        <a:t>48,111</a:t>
                       </a:r>
                     </a:p>
                   </a:txBody>
@@ -10637,7 +10637,7 @@
                           </a:solidFill>
                           <a:latin typeface="Times New Roman"/>
                         </a:rPr>
-                        <a:t>60,483</a:t>
+                        <a:t>60,655</a:t>
                       </a:r>
                     </a:p>
                   </a:txBody>
@@ -10754,7 +10754,7 @@
                 </a:solidFill>
                 <a:latin typeface="Times New Roman"/>
               </a:rPr>
-              <a:t> = zeroed variables (in RAM, not in the file). The ELF file (36,920 B here) also holds symbols; the </a:t>
+              <a:t> = zeroed variables (in RAM, not in the file). The ELF file (37,024 B here) also holds symbols; the </a:t>
             </a:r>
             <a:r>
               <a:rPr sz="1600" b="0" i="1">
@@ -10772,7 +10772,7 @@
                 </a:solidFill>
                 <a:latin typeface="Times New Roman"/>
               </a:rPr>
-              <a:t> (25,328 B) is what gets loaded.</a:t>
+              <a:t> (25,432 B) is what gets loaded.</a:t>
             </a:r>
           </a:p>
           <a:p>
@@ -28582,7 +28582,7 @@
                 <a:latin typeface="Times New Roman"/>
                 <a:ea typeface="DejaVu Sans"/>
               </a:rPr>
-              <a:t>[YYYY/MM]</a:t>
+              <a:t>2026/12</a:t>
             </a:r>
             <a:endParaRPr lang="en-US" sz="3200" b="0" strike="noStrike" spc="-1" dirty="0">
               <a:latin typeface="Arial"/>
@@ -28746,7 +28746,7 @@
                 <a:latin typeface="Times New Roman"/>
                 <a:ea typeface="DejaVu Sans"/>
               </a:rPr>
-              <a:t>[YYYY/MM]</a:t>
+              <a:t>2026/12</a:t>
             </a:r>
             <a:endParaRPr lang="en-US" sz="3200" b="0" strike="noStrike" spc="-1" dirty="0">
               <a:latin typeface="Arial"/>
@@ -28848,7 +28848,7 @@
                 <a:latin typeface="Times New Roman"/>
                 <a:ea typeface="DejaVu Sans"/>
               </a:rPr>
-              <a:t>[Course name]</a:t>
+              <a:t>EDHOC on a Rocket RV64 SoC</a:t>
             </a:r>
             <a:r>
               <a:rPr lang="en-US" sz="4800" spc="-1" dirty="0">
@@ -29073,7 +29073,7 @@
                 <a:latin typeface="Times New Roman" panose="02020603050405020304" pitchFamily="18" charset="0"/>
                 <a:cs typeface="Times New Roman" panose="02020603050405020304" pitchFamily="18" charset="0"/>
               </a:rPr>
-              <a:t>[Author]</a:t>
+              <a:t>Khai-Duy Nguyen</a:t>
             </a:r>
           </a:p>
         </p:txBody>

--- a/fpga/sw/export/docs/slides/02_Software_environment_and_tests.pptx
+++ b/fpga/sw/export/docs/slides/02_Software_environment_and_tests.pptx
@@ -16945,7 +16945,7 @@
                           </a:solidFill>
                           <a:latin typeface="Times New Roman"/>
                         </a:rPr>
-                        <a:t>radio on PMOD JC (default) or UART1 wire on JB</a:t>
+                        <a:t>radio on PMOD JC (default) or 3 wires on JB (921,600 baud, UART1_BAUD=)</a:t>
                       </a:r>
                     </a:p>
                   </a:txBody>

--- a/fpga/sw/export/docs/slides/02_Software_environment_and_tests.pptx
+++ b/fpga/sw/export/docs/slides/02_Software_environment_and_tests.pptx
@@ -10154,7 +10154,7 @@
                 </a:solidFill>
                 <a:latin typeface="Consolas"/>
               </a:rPr>
-              <a:t>25425     0  1640  27065  69b9 build/edhoc_m3_...</a:t>
+              <a:t>25523     0  1640  27163  6a1b build/edhoc_m3_...</a:t>
             </a:r>
           </a:p>
           <a:p>
@@ -10393,7 +10393,7 @@
                           </a:solidFill>
                           <a:latin typeface="Times New Roman"/>
                         </a:rPr>
-                        <a:t>25,425</a:t>
+                        <a:t>25,523</a:t>
                       </a:r>
                     </a:p>
                   </a:txBody>
@@ -10437,7 +10437,7 @@
                           </a:solidFill>
                           <a:latin typeface="Times New Roman"/>
                         </a:rPr>
-                        <a:t>27,065</a:t>
+                        <a:t>27,163</a:t>
                       </a:r>
                     </a:p>
                   </a:txBody>
@@ -10481,7 +10481,7 @@
                           </a:solidFill>
                           <a:latin typeface="Times New Roman"/>
                         </a:rPr>
-                        <a:t>32,441</a:t>
+                        <a:t>32,539</a:t>
                       </a:r>
                     </a:p>
                   </a:txBody>
@@ -10503,7 +10503,7 @@
                           </a:solidFill>
                           <a:latin typeface="Times New Roman"/>
                         </a:rPr>
-                        <a:t>32 KiB (327 B left)</a:t>
+                        <a:t>32 KiB (229 B left)</a:t>
                       </a:r>
                     </a:p>
                   </a:txBody>
@@ -10549,7 +10549,7 @@
                           </a:solidFill>
                           <a:latin typeface="Times New Roman"/>
                         </a:rPr>
-                        <a:t>46,359</a:t>
+                        <a:t>46,457</a:t>
                       </a:r>
                     </a:p>
                   </a:txBody>
@@ -10593,7 +10593,7 @@
                           </a:solidFill>
                           <a:latin typeface="Times New Roman"/>
                         </a:rPr>
-                        <a:t>48,111</a:t>
+                        <a:t>48,209</a:t>
                       </a:r>
                     </a:p>
                   </a:txBody>
@@ -10637,7 +10637,7 @@
                           </a:solidFill>
                           <a:latin typeface="Times New Roman"/>
                         </a:rPr>
-                        <a:t>60,655</a:t>
+                        <a:t>60,753</a:t>
                       </a:r>
                     </a:p>
                   </a:txBody>
@@ -10754,7 +10754,7 @@
                 </a:solidFill>
                 <a:latin typeface="Times New Roman"/>
               </a:rPr>
-              <a:t> = zeroed variables (in RAM, not in the file). The ELF file (37,024 B here) also holds symbols; the </a:t>
+              <a:t> = zeroed variables (in RAM, not in the file). The ELF file (37,128 B here) also holds symbols; the </a:t>
             </a:r>
             <a:r>
               <a:rPr sz="1600" b="0" i="1">
@@ -10772,7 +10772,7 @@
                 </a:solidFill>
                 <a:latin typeface="Times New Roman"/>
               </a:rPr>
-              <a:t> (25,432 B) is what gets loaded.</a:t>
+              <a:t> (25,536 B) is what gets loaded. Default flags: no TIMING, DEBUG or APP options, TRANSPORT=rf.</a:t>
             </a:r>
           </a:p>
           <a:p>
@@ -11371,6 +11371,41 @@
                 <a:latin typeface="Times New Roman"/>
               </a:rPr>
               <a:t> fails it. The reserves in this course are measured peak + 25 %.</a:t>
+            </a:r>
+          </a:p>
+          <a:p>
+            <a:pPr marL="256032" indent="-219456">
+              <a:spcAft>
+                <a:spcPts val="400"/>
+              </a:spcAft>
+              <a:buChar char="•"/>
+            </a:pPr>
+            <a:r>
+              <a:rPr sz="1800" b="0">
+                <a:solidFill>
+                  <a:srgbClr val="000000"/>
+                </a:solidFill>
+                <a:latin typeface="Times New Roman"/>
+              </a:rPr>
+              <a:t>This line comes right after the handshake. A second one, </a:t>
+            </a:r>
+            <a:r>
+              <a:rPr sz="1800" b="0" i="1">
+                <a:solidFill>
+                  <a:srgbClr val="000000"/>
+                </a:solidFill>
+                <a:latin typeface="Times New Roman"/>
+              </a:rPr>
+              <a:t>STACK whole run</a:t>
+            </a:r>
+            <a:r>
+              <a:rPr sz="1800" b="0">
+                <a:solidFill>
+                  <a:srgbClr val="000000"/>
+                </a:solidFill>
+                <a:latin typeface="Times New Roman"/>
+              </a:rPr>
+              <a:t>, at the very end also covers the application step (echo, file transfer).</a:t>
             </a:r>
           </a:p>
         </p:txBody>
@@ -16945,7 +16980,7 @@
                           </a:solidFill>
                           <a:latin typeface="Times New Roman"/>
                         </a:rPr>
-                        <a:t>radio on PMOD JC (default) or 3 wires on JB (921,600 baud, UART1_BAUD=)</a:t>
+                        <a:t>radio on PMOD JC (default) or 3 wires on JB (921,600 baud; EXTRA_CFLAGS=-DUART1_BAUD=…)</a:t>
                       </a:r>
                     </a:p>
                   </a:txBody>

--- a/fpga/sw/export/docs/slides/02_Software_environment_and_tests.pptx
+++ b/fpga/sw/export/docs/slides/02_Software_environment_and_tests.pptx
@@ -8972,7 +8972,7 @@
                           </a:solidFill>
                           <a:latin typeface="Times New Roman"/>
                         </a:rPr>
-                        <a:t>SHA-256/384, HMAC/HKDF, AES-CCM/GCM, KMAC — our own, small</a:t>
+                        <a:t>SHA-256/384, HMAC/HKDF, AES-CCM/GCM, KMAC — written for this tree, small</a:t>
                       </a:r>
                     </a:p>
                   </a:txBody>
@@ -10347,7 +10347,7 @@
                           </a:solidFill>
                           <a:latin typeface="Times New Roman"/>
                         </a:rPr>
-                        <a:t>fits</a:t>
+                        <a:t>left of 64 KiB</a:t>
                       </a:r>
                     </a:p>
                   </a:txBody>
@@ -10503,7 +10503,7 @@
                           </a:solidFill>
                           <a:latin typeface="Times New Roman"/>
                         </a:rPr>
-                        <a:t>32 KiB (229 B left)</a:t>
+                        <a:t>32,997 B</a:t>
                       </a:r>
                     </a:p>
                   </a:txBody>
@@ -10659,7 +10659,7 @@
                           </a:solidFill>
                           <a:latin typeface="Times New Roman"/>
                         </a:rPr>
-                        <a:t>64 KiB only</a:t>
+                        <a:t>4,783 B</a:t>
                       </a:r>
                     </a:p>
                   </a:txBody>
@@ -10842,7 +10842,7 @@
                 </a:solidFill>
                 <a:latin typeface="Times New Roman"/>
               </a:rPr>
-              <a:t>Bigger curves and signatures cost both code and stack: that is why suite and method decide whether 32 KiB is enough (Lesson 1).</a:t>
+              <a:t>Bigger curves and signatures cost both code and stack: suite and method decide how much of the 64 KiB is left.</a:t>
             </a:r>
           </a:p>
         </p:txBody>
@@ -15927,7 +15927,7 @@
                           </a:solidFill>
                           <a:latin typeface="Times New Roman"/>
                         </a:rPr>
-                        <a:t>no C library, our own crt0.S</a:t>
+                        <a:t>no C library, the tree's own crt0.S</a:t>
                       </a:r>
                     </a:p>
                   </a:txBody>
@@ -16109,18 +16109,18 @@
               </a:buClr>
             </a:pPr>
             <a:r>
-              <a:rPr lang="en-US" sz="3500" b="1" spc="-1" dirty="0">
+              <a:rPr lang="en-US" sz="2400" b="1" spc="-1" dirty="0">
                 <a:latin typeface="Times New Roman" panose="02020603050405020304" pitchFamily="18" charset="0"/>
                 <a:cs typeface="Times New Roman" panose="02020603050405020304" pitchFamily="18" charset="0"/>
               </a:rPr>
               <a:t>3. Build System </a:t>
             </a:r>
             <a:r>
-              <a:rPr lang="en-US" sz="3500" spc="-1" dirty="0">
+              <a:rPr lang="en-US" sz="2400" spc="-1" dirty="0">
                 <a:latin typeface="Times New Roman" panose="02020603050405020304" pitchFamily="18" charset="0"/>
                 <a:cs typeface="Times New Roman" panose="02020603050405020304" pitchFamily="18" charset="0"/>
               </a:rPr>
-              <a:t>(3/4) A real build bug: stale objects</a:t>
+              <a:t>(3/4) Switching suite, method or role: no make clean needed</a:t>
             </a:r>
           </a:p>
         </p:txBody>
@@ -16236,7 +16236,7 @@
                 </a:solidFill>
                 <a:latin typeface="Times New Roman"/>
               </a:rPr>
-              <a:t> folder and differ only in flags (method, role, suite).</a:t>
+              <a:t> folder and differ only in flags (method, role, suite). Make by itself compares only file times, so it would reuse objects built with other flags — an image of the wrong method, no error.</a:t>
             </a:r>
           </a:p>
           <a:p>
@@ -16253,61 +16253,7 @@
                 </a:solidFill>
                 <a:latin typeface="Times New Roman"/>
               </a:rPr>
-              <a:t>Make only looks at file times. Building </a:t>
-            </a:r>
-            <a:r>
-              <a:rPr sz="1700" b="0" i="1">
-                <a:solidFill>
-                  <a:srgbClr val="000000"/>
-                </a:solidFill>
-                <a:latin typeface="Times New Roman"/>
-              </a:rPr>
-              <a:t>m1_responder</a:t>
-            </a:r>
-            <a:r>
-              <a:rPr sz="1700" b="0">
-                <a:solidFill>
-                  <a:srgbClr val="000000"/>
-                </a:solidFill>
-                <a:latin typeface="Times New Roman"/>
-              </a:rPr>
-              <a:t> and then </a:t>
-            </a:r>
-            <a:r>
-              <a:rPr sz="1700" b="0" i="1">
-                <a:solidFill>
-                  <a:srgbClr val="000000"/>
-                </a:solidFill>
-                <a:latin typeface="Times New Roman"/>
-              </a:rPr>
-              <a:t>m2_initiator</a:t>
-            </a:r>
-            <a:r>
-              <a:rPr sz="1700" b="0">
-                <a:solidFill>
-                  <a:srgbClr val="000000"/>
-                </a:solidFill>
-                <a:latin typeface="Times New Roman"/>
-              </a:rPr>
-              <a:t> reused objects compiled for method 1 → </a:t>
-            </a:r>
-            <a:r>
-              <a:rPr sz="1700" b="1">
-                <a:solidFill>
-                  <a:srgbClr val="000000"/>
-                </a:solidFill>
-                <a:latin typeface="Times New Roman"/>
-              </a:rPr>
-              <a:t>an image of the wrong method</a:t>
-            </a:r>
-            <a:r>
-              <a:rPr sz="1700" b="0">
-                <a:solidFill>
-                  <a:srgbClr val="000000"/>
-                </a:solidFill>
-                <a:latin typeface="Times New Roman"/>
-              </a:rPr>
-              <a:t>, no error, wrong handshake.</a:t>
+              <a:t>The build keeps an empty stamp file named after a hash of the flags. New flags → new stamp name → every object is older than its stamp → everything recompiles.</a:t>
             </a:r>
           </a:p>
           <a:p>
@@ -16324,16 +16270,17 @@
                 </a:solidFill>
                 <a:latin typeface="Times New Roman"/>
               </a:rPr>
-              <a:t>Fix: an empty stamp file named after a hash of the flags. New flags → new stamp name → every object is older than its stamp → rebuild.</a:t>
-            </a:r>
-          </a:p>
-          <a:p>
-            <a:pPr marL="256032" indent="-219456">
-              <a:spcAft>
-                <a:spcPts val="400"/>
-              </a:spcAft>
-              <a:buChar char="•"/>
-            </a:pPr>
+              <a:t>Check it: run </a:t>
+            </a:r>
+            <a:r>
+              <a:rPr sz="1500" b="0">
+                <a:solidFill>
+                  <a:srgbClr val="8B1A1A"/>
+                </a:solidFill>
+                <a:latin typeface="Consolas"/>
+              </a:rPr>
+              <a:t>ls build/.cflags-*</a:t>
+            </a:r>
             <a:r>
               <a:rPr sz="1700" b="0">
                 <a:solidFill>
@@ -16341,25 +16288,7 @@
                 </a:solidFill>
                 <a:latin typeface="Times New Roman"/>
               </a:rPr>
-              <a:t>Check it: </a:t>
-            </a:r>
-            <a:r>
-              <a:rPr sz="1500" b="0">
-                <a:solidFill>
-                  <a:srgbClr val="8B1A1A"/>
-                </a:solidFill>
-                <a:latin typeface="Consolas"/>
-              </a:rPr>
-              <a:t>ls build/.cflags-*</a:t>
-            </a:r>
-            <a:r>
-              <a:rPr sz="1700" b="0">
-                <a:solidFill>
-                  <a:srgbClr val="000000"/>
-                </a:solidFill>
-                <a:latin typeface="Times New Roman"/>
-              </a:rPr>
-              <a:t> before and after changing CRYPTO_SUITE — the name changes and every object compiles again.</a:t>
+              <a:t>, build with another CRYPTO_SUITE, run it again — the name changes and every object compiles again.</a:t>
             </a:r>
           </a:p>
         </p:txBody>
@@ -22348,18 +22277,18 @@
               </a:buClr>
             </a:pPr>
             <a:r>
-              <a:rPr lang="en-US" sz="3600" b="1" spc="-1" dirty="0">
+              <a:rPr lang="en-US" sz="3200" b="1" spc="-1" dirty="0">
                 <a:latin typeface="Times New Roman" panose="02020603050405020304" pitchFamily="18" charset="0"/>
                 <a:cs typeface="Times New Roman" panose="02020603050405020304" pitchFamily="18" charset="0"/>
               </a:rPr>
               <a:t>5. Peripheral Tests </a:t>
             </a:r>
             <a:r>
-              <a:rPr lang="en-US" sz="3600" spc="-1" dirty="0">
+              <a:rPr lang="en-US" sz="3200" spc="-1" dirty="0">
                 <a:latin typeface="Times New Roman" panose="02020603050405020304" pitchFamily="18" charset="0"/>
                 <a:cs typeface="Times New Roman" panose="02020603050405020304" pitchFamily="18" charset="0"/>
               </a:rPr>
-              <a:t>(3/3) What the SD test taught us</a:t>
+              <a:t>(3/3) If spi_test shows R1 = 3f or 7f</a:t>
             </a:r>
           </a:p>
         </p:txBody>
@@ -22560,25 +22489,7 @@
                 </a:solidFill>
                 <a:latin typeface="Times New Roman"/>
               </a:rPr>
-              <a:t>The first version reported SD </a:t>
-            </a:r>
-            <a:r>
-              <a:rPr sz="1800" b="1">
-                <a:solidFill>
-                  <a:srgbClr val="000000"/>
-                </a:solidFill>
-                <a:latin typeface="Times New Roman"/>
-              </a:rPr>
-              <a:t>FAIL</a:t>
-            </a:r>
-            <a:r>
-              <a:rPr sz="1800" b="0">
-                <a:solidFill>
-                  <a:srgbClr val="000000"/>
-                </a:solidFill>
-                <a:latin typeface="Times New Roman"/>
-              </a:rPr>
-              <a:t> on both boards (R1 = 0x3f / 0x7f). The cards were fine.</a:t>
+              <a:t>Right after the card powers up it can answer the first CMD0 with one junk byte (bit 7 clear, e.g. 0x3f). The card is fine.</a:t>
             </a:r>
           </a:p>
           <a:p>
@@ -22595,7 +22506,7 @@
                 </a:solidFill>
                 <a:latin typeface="Times New Roman"/>
               </a:rPr>
-              <a:t>Right after power-up the card sends one junk byte with bit 7 clear before its real answer; the test took the junk for the answer.</a:t>
+              <a:t>spi_test, the firmware and the boot ROM all send CMD0 up to 10 times until R1 = 0x01, so normally you only see PASS.</a:t>
             </a:r>
           </a:p>
           <a:p>
@@ -22612,7 +22523,7 @@
                 </a:solidFill>
                 <a:latin typeface="Times New Roman"/>
               </a:rPr>
-              <a:t>Fix: send CMD0 up to 10 times until R1 = 0x01 (tests and firmware). Most SD drivers do the same.</a:t>
+              <a:t>If you still see 3f / 7f: check the card is pushed fully in and the PmodMicroSD sits in the top row of JA; then print the raw bytes (as above) — not every card answers at the same moment.</a:t>
             </a:r>
           </a:p>
           <a:p>
@@ -22629,7 +22540,7 @@
                 </a:solidFill>
                 <a:latin typeface="Times New Roman"/>
               </a:rPr>
-              <a:t>Lesson: print the </a:t>
+              <a:t>Rule of thumb for any SPI device: look at the </a:t>
             </a:r>
             <a:r>
               <a:rPr sz="1800" b="1">

--- a/fpga/sw/export/docs/slides/02_Software_environment_and_tests.pptx
+++ b/fpga/sw/export/docs/slides/02_Software_environment_and_tests.pptx
@@ -10789,43 +10789,25 @@
                 </a:solidFill>
                 <a:latin typeface="Times New Roman"/>
               </a:rPr>
-              <a:t>Fits = image + reserve ≤ RAM (the linker check) </a:t>
-            </a:r>
-            <a:r>
-              <a:rPr sz="1600" b="1">
+              <a:t>The table sums section bytes; alignment can add padding. The linker checks </a:t>
+            </a:r>
+            <a:r>
+              <a:rPr sz="1400" b="0">
+                <a:solidFill>
+                  <a:srgbClr val="8B1A1A"/>
+                </a:solidFill>
+                <a:latin typeface="Consolas"/>
+              </a:rPr>
+              <a:t>_end - 0x80000000 + __stack_reserve ≤ 65536</a:t>
+            </a:r>
+            <a:r>
+              <a:rPr sz="1600" b="0">
                 <a:solidFill>
                   <a:srgbClr val="000000"/>
                 </a:solidFill>
                 <a:latin typeface="Times New Roman"/>
               </a:rPr>
-              <a:t>and</a:t>
-            </a:r>
-            <a:r>
-              <a:rPr sz="1600" b="0">
-                <a:solidFill>
-                  <a:srgbClr val="000000"/>
-                </a:solidFill>
-                <a:latin typeface="Times New Roman"/>
-              </a:rPr>
-              <a:t> the board's STACK peak ≤ reserve (next slide). The reserve per suite and role is in </a:t>
-            </a:r>
-            <a:r>
-              <a:rPr sz="1600" b="0" i="1">
-                <a:solidFill>
-                  <a:srgbClr val="000000"/>
-                </a:solidFill>
-                <a:latin typeface="Times New Roman"/>
-              </a:rPr>
-              <a:t>mk/config.mk</a:t>
-            </a:r>
-            <a:r>
-              <a:rPr sz="1600" b="0">
-                <a:solidFill>
-                  <a:srgbClr val="000000"/>
-                </a:solidFill>
-                <a:latin typeface="Times New Roman"/>
-              </a:rPr>
-              <a:t>.</a:t>
+              <a:t> (see the map). Also check the board's stack peak against the reserve (next slide).</a:t>
             </a:r>
           </a:p>
           <a:p>
@@ -10842,7 +10824,7 @@
                 </a:solidFill>
                 <a:latin typeface="Times New Roman"/>
               </a:rPr>
-              <a:t>Bigger curves and signatures cost both code and stack: suite and method decide how much of the 64 KiB is left.</a:t>
+              <a:t>Why 64 KiB? Most configurations exceed 32 KiB including stack. A small initiator fitting alone does not prove its responder fits: check both roles.</a:t>
             </a:r>
           </a:p>
         </p:txBody>
@@ -12902,7 +12884,7 @@
                 </a:solidFill>
                 <a:latin typeface="Consolas"/>
               </a:rPr>
-              <a:t>Edit — fpga/sw/export/common/board/boards.env (our values shown)</a:t>
+              <a:t>Edit — fpga/sw/export/common/board/boards.env (ships with ours: replace all four)</a:t>
             </a:r>
           </a:p>
           <a:p>
@@ -21713,7 +21695,7 @@
                 </a:solidFill>
                 <a:latin typeface="Times New Roman"/>
               </a:rPr>
-              <a:t>Console output of each: Lesson 1, section 5.</a:t>
+              <a:t>Console output of each: Lesson 1, section 6.</a:t>
             </a:r>
           </a:p>
         </p:txBody>

--- a/fpga/sw/export/docs/slides/02_Software_environment_and_tests.pptx
+++ b/fpga/sw/export/docs/slides/02_Software_environment_and_tests.pptx
@@ -7616,7 +7616,7 @@
         <p:spPr>
           <a:xfrm>
             <a:off x="365760" y="868680"/>
-            <a:ext cx="11430000" cy="1595628"/>
+            <a:ext cx="11430000" cy="2215388"/>
           </a:xfrm>
           <a:prstGeom prst="rect">
             <a:avLst/>
@@ -7649,13 +7649,25 @@
           <a:bodyPr rtlCol="0" anchor="t" wrap="none" lIns="73152" rIns="73152" tIns="73152" bIns="73152"/>
           <a:lstStyle/>
           <a:p>
+            <a:pPr algn="l"/>
+            <a:r>
+              <a:rPr sz="1300" b="1">
+                <a:solidFill>
+                  <a:srgbClr val="808080"/>
+                </a:solidFill>
+                <a:latin typeface="Consolas"/>
+              </a:rPr>
+              <a:t>Run this — already done if you followed Lesson 1, (7/11)</a:t>
+            </a:r>
+          </a:p>
+          <a:p>
             <a:pPr algn="l">
               <a:lnSpc>
                 <a:spcPct val="100000"/>
               </a:lnSpc>
             </a:pPr>
             <a:r>
-              <a:rPr sz="1500">
+              <a:rPr sz="1300">
                 <a:solidFill>
                   <a:srgbClr val="1F1F1F"/>
                 </a:solidFill>
@@ -7671,13 +7683,13 @@
               </a:lnSpc>
             </a:pPr>
             <a:r>
-              <a:rPr sz="1500">
+              <a:rPr sz="1300">
                 <a:solidFill>
                   <a:srgbClr val="1F1F1F"/>
                 </a:solidFill>
                 <a:latin typeface="Consolas"/>
               </a:rPr>
-              <a:t>cd riscv-gnu-toolchain</a:t>
+              <a:t>cd riscv-gnu-toolchain &amp;&amp; git checkout 2025.06.07</a:t>
             </a:r>
           </a:p>
           <a:p>
@@ -7687,13 +7699,13 @@
               </a:lnSpc>
             </a:pPr>
             <a:r>
-              <a:rPr sz="1500">
+              <a:rPr sz="1300">
                 <a:solidFill>
                   <a:srgbClr val="1F1F1F"/>
                 </a:solidFill>
                 <a:latin typeface="Consolas"/>
               </a:rPr>
-              <a:t>./configure --prefix=$HOME/opt/riscv --with-multilib-generator="rv64imac-lp64--"</a:t>
+              <a:t>git config submodule.binutils.url https://github.com/gnutools/binutils-gdb.git</a:t>
             </a:r>
           </a:p>
           <a:p>
@@ -7703,13 +7715,13 @@
               </a:lnSpc>
             </a:pPr>
             <a:r>
-              <a:rPr sz="1500">
+              <a:rPr sz="1300">
                 <a:solidFill>
                   <a:srgbClr val="1F1F1F"/>
                 </a:solidFill>
                 <a:latin typeface="Consolas"/>
               </a:rPr>
-              <a:t>make -j$(nproc)                        # newlib (bare-metal) toolchain</a:t>
+              <a:t>git config submodule.gdb.url https://github.com/gnutools/binutils-gdb.git</a:t>
             </a:r>
           </a:p>
           <a:p>
@@ -7719,13 +7731,13 @@
               </a:lnSpc>
             </a:pPr>
             <a:r>
-              <a:rPr sz="1500">
+              <a:rPr sz="1300">
                 <a:solidFill>
                   <a:srgbClr val="1F1F1F"/>
                 </a:solidFill>
                 <a:latin typeface="Consolas"/>
               </a:rPr>
-              <a:t>export PATH=$HOME/opt/riscv/bin:$PATH</a:t>
+              <a:t>git config submodule.newlib.url https://github.com/cygwin/cygwin.git</a:t>
             </a:r>
           </a:p>
           <a:p>
@@ -7735,13 +7747,61 @@
               </a:lnSpc>
             </a:pPr>
             <a:r>
-              <a:rPr sz="1500">
+              <a:rPr sz="1300">
                 <a:solidFill>
                   <a:srgbClr val="1F1F1F"/>
                 </a:solidFill>
                 <a:latin typeface="Consolas"/>
               </a:rPr>
-              <a:t>riscv64-unknown-elf-gcc --version      # ours: 15.1.0</a:t>
+              <a:t>./configure --prefix=$HOME/opt/riscv --with-multilib-generator="rv64imac-lp64--"</a:t>
+            </a:r>
+          </a:p>
+          <a:p>
+            <a:pPr algn="l">
+              <a:lnSpc>
+                <a:spcPct val="100000"/>
+              </a:lnSpc>
+            </a:pPr>
+            <a:r>
+              <a:rPr sz="1300">
+                <a:solidFill>
+                  <a:srgbClr val="1F1F1F"/>
+                </a:solidFill>
+                <a:latin typeface="Consolas"/>
+              </a:rPr>
+              <a:t>make -j$(nproc)                        # newlib (bare-metal) toolchain</a:t>
+            </a:r>
+          </a:p>
+          <a:p>
+            <a:pPr algn="l">
+              <a:lnSpc>
+                <a:spcPct val="100000"/>
+              </a:lnSpc>
+            </a:pPr>
+            <a:r>
+              <a:rPr sz="1300">
+                <a:solidFill>
+                  <a:srgbClr val="1F1F1F"/>
+                </a:solidFill>
+                <a:latin typeface="Consolas"/>
+              </a:rPr>
+              <a:t>export PATH=$HOME/opt/riscv/bin:$PATH</a:t>
+            </a:r>
+          </a:p>
+          <a:p>
+            <a:pPr algn="l">
+              <a:lnSpc>
+                <a:spcPct val="100000"/>
+              </a:lnSpc>
+            </a:pPr>
+            <a:r>
+              <a:rPr sz="1300">
+                <a:solidFill>
+                  <a:srgbClr val="1F1F1F"/>
+                </a:solidFill>
+                <a:latin typeface="Consolas"/>
+              </a:rPr>
+              <a:t>riscv64-unknown-elf-gcc --version      # 15.1.0</a:t>
             </a:r>
           </a:p>
         </p:txBody>
@@ -7754,7 +7814,7 @@
         </p:nvSpPr>
         <p:spPr>
           <a:xfrm>
-            <a:off x="365760" y="2738627"/>
+            <a:off x="365760" y="3358388"/>
             <a:ext cx="11430000" cy="2926080"/>
           </a:xfrm>
           <a:prstGeom prst="rect">
@@ -7775,7 +7835,7 @@
               <a:buChar char="•"/>
             </a:pPr>
             <a:r>
-              <a:rPr sz="1800" b="0">
+              <a:rPr sz="1600" b="0">
                 <a:solidFill>
                   <a:srgbClr val="000000"/>
                 </a:solidFill>
@@ -7784,7 +7844,7 @@
               <a:t>Bare metal: no operating system, no C library at run time — the firmware brings its own </a:t>
             </a:r>
             <a:r>
-              <a:rPr sz="1800" b="0" i="1">
+              <a:rPr sz="1600" b="0" i="1">
                 <a:solidFill>
                   <a:srgbClr val="000000"/>
                 </a:solidFill>
@@ -7793,7 +7853,7 @@
               <a:t>memcpy</a:t>
             </a:r>
             <a:r>
-              <a:rPr sz="1800" b="0">
+              <a:rPr sz="1600" b="0">
                 <a:solidFill>
                   <a:srgbClr val="000000"/>
                 </a:solidFill>
@@ -7802,7 +7862,7 @@
               <a:t>, </a:t>
             </a:r>
             <a:r>
-              <a:rPr sz="1800" b="0" i="1">
+              <a:rPr sz="1600" b="0" i="1">
                 <a:solidFill>
                   <a:srgbClr val="000000"/>
                 </a:solidFill>
@@ -7811,7 +7871,7 @@
               <a:t>printf</a:t>
             </a:r>
             <a:r>
-              <a:rPr sz="1800" b="0">
+              <a:rPr sz="1600" b="0">
                 <a:solidFill>
                   <a:srgbClr val="000000"/>
                 </a:solidFill>
@@ -7828,7 +7888,7 @@
               <a:buChar char="•"/>
             </a:pPr>
             <a:r>
-              <a:rPr sz="1800" b="0">
+              <a:rPr sz="1600" b="0">
                 <a:solidFill>
                   <a:srgbClr val="000000"/>
                 </a:solidFill>
@@ -7837,7 +7897,7 @@
               <a:t>Target: </a:t>
             </a:r>
             <a:r>
-              <a:rPr sz="1800" b="1">
+              <a:rPr sz="1600" b="1">
                 <a:solidFill>
                   <a:srgbClr val="000000"/>
                 </a:solidFill>
@@ -7846,7 +7906,7 @@
               <a:t>rv64imac / lp64</a:t>
             </a:r>
             <a:r>
-              <a:rPr sz="1800" b="0">
+              <a:rPr sz="1600" b="0">
                 <a:solidFill>
                   <a:srgbClr val="000000"/>
                 </a:solidFill>
@@ -7863,7 +7923,7 @@
               <a:buChar char="•"/>
             </a:pPr>
             <a:r>
-              <a:rPr sz="1800" b="0">
+              <a:rPr sz="1600" b="0">
                 <a:solidFill>
                   <a:srgbClr val="000000"/>
                 </a:solidFill>
@@ -7872,7 +7932,7 @@
               <a:t>Toolchain somewhere else? Pass the prefix instead of PATH: </a:t>
             </a:r>
             <a:r>
-              <a:rPr sz="1600" b="0">
+              <a:rPr sz="1400" b="0">
                 <a:solidFill>
                   <a:srgbClr val="8B1A1A"/>
                 </a:solidFill>
@@ -7889,7 +7949,7 @@
               <a:buChar char="•"/>
             </a:pPr>
             <a:r>
-              <a:rPr sz="1800" b="0">
+              <a:rPr sz="1600" b="0">
                 <a:solidFill>
                   <a:srgbClr val="000000"/>
                 </a:solidFill>

--- a/fpga/sw/export/docs/slides/02_Software_environment_and_tests.pptx
+++ b/fpga/sw/export/docs/slides/02_Software_environment_and_tests.pptx
@@ -7616,7 +7616,7 @@
         <p:spPr>
           <a:xfrm>
             <a:off x="365760" y="868680"/>
-            <a:ext cx="11430000" cy="2215388"/>
+            <a:ext cx="11430000" cy="2416810"/>
           </a:xfrm>
           <a:prstGeom prst="rect">
             <a:avLst/>
@@ -7657,7 +7657,23 @@
                 </a:solidFill>
                 <a:latin typeface="Consolas"/>
               </a:rPr>
-              <a:t>Run this — already done if you followed Lesson 1, (7/11)</a:t>
+              <a:t>Run this — already done if you followed Lesson 1, (7/12)</a:t>
+            </a:r>
+          </a:p>
+          <a:p>
+            <a:pPr algn="l">
+              <a:lnSpc>
+                <a:spcPct val="100000"/>
+              </a:lnSpc>
+            </a:pPr>
+            <a:r>
+              <a:rPr sz="1300">
+                <a:solidFill>
+                  <a:srgbClr val="1F1F1F"/>
+                </a:solidFill>
+                <a:latin typeface="Consolas"/>
+              </a:rPr>
+              <a:t>cd ~</a:t>
             </a:r>
           </a:p>
           <a:p>
@@ -7814,7 +7830,7 @@
         </p:nvSpPr>
         <p:spPr>
           <a:xfrm>
-            <a:off x="365760" y="3358388"/>
+            <a:off x="365760" y="3559809"/>
             <a:ext cx="11430000" cy="2926080"/>
           </a:xfrm>
           <a:prstGeom prst="rect">
@@ -10079,7 +10095,7 @@
                 </a:solidFill>
                 <a:latin typeface="Consolas"/>
               </a:rPr>
-              <a:t>cd fpga/sw/export/edhoc-wolfssl</a:t>
+              <a:t>cd $REPO/fpga/sw/export/edhoc-wolfssl</a:t>
             </a:r>
           </a:p>
           <a:p>
@@ -12145,7 +12161,7 @@
                 </a:solidFill>
                 <a:latin typeface="Consolas"/>
               </a:rPr>
-              <a:t>cd fpga/sw/export</a:t>
+              <a:t>cd $REPO/fpga/sw/export</a:t>
             </a:r>
           </a:p>
           <a:p>
@@ -12944,7 +12960,7 @@
                 </a:solidFill>
                 <a:latin typeface="Consolas"/>
               </a:rPr>
-              <a:t>Edit — fpga/sw/export/common/board/boards.env (ships with ours: replace all four)</a:t>
+              <a:t>Edit — $REPO/fpga/sw/export/common/board/boards.env (ships with ours: replace all four)</a:t>
             </a:r>
           </a:p>
           <a:p>
@@ -13079,7 +13095,7 @@
                 </a:solidFill>
                 <a:latin typeface="Consolas"/>
               </a:rPr>
-              <a:t>cd fpga/sw/export/tests &amp;&amp; make gpio_test</a:t>
+              <a:t>cd $REPO/fpga/sw/export/tests &amp;&amp; make gpio_test</a:t>
             </a:r>
           </a:p>
           <a:p>
@@ -13751,7 +13767,7 @@
                 </a:solidFill>
                 <a:latin typeface="Consolas"/>
               </a:rPr>
-              <a:t>cd fpga/sw/export/tests</a:t>
+              <a:t>cd $REPO/fpga/sw/export/tests</a:t>
             </a:r>
           </a:p>
           <a:p>
@@ -15260,7 +15276,7 @@
                 </a:solidFill>
                 <a:latin typeface="Consolas"/>
               </a:rPr>
-              <a:t>cd fpga/sw/export/edhoc-wolfssl</a:t>
+              <a:t>cd $REPO/fpga/sw/export/edhoc-wolfssl</a:t>
             </a:r>
           </a:p>
           <a:p>
@@ -21684,7 +21700,7 @@
                 </a:solidFill>
                 <a:latin typeface="Consolas"/>
               </a:rPr>
-              <a:t>cd fpga/sw/export/tests</a:t>
+              <a:t>cd $REPO/fpga/sw/export/tests</a:t>
             </a:r>
           </a:p>
           <a:p>

--- a/fpga/sw/export/docs/slides/02_Software_environment_and_tests.pptx
+++ b/fpga/sw/export/docs/slides/02_Software_environment_and_tests.pptx
@@ -22346,7 +22346,7 @@
                 <a:latin typeface="Times New Roman" panose="02020603050405020304" pitchFamily="18" charset="0"/>
                 <a:cs typeface="Times New Roman" panose="02020603050405020304" pitchFamily="18" charset="0"/>
               </a:rPr>
-              <a:t>(3/3) If spi_test shows R1 = 3f or 7f</a:t>
+              <a:t>(3/3) SD card start-up: R1 = 3f or 7f</a:t>
             </a:r>
           </a:p>
         </p:txBody>
